--- a/19_05.pptx
+++ b/19_05.pptx
@@ -7,6 +7,7 @@
   <p:sldIdLst>
     <p:sldId id="256" r:id="rId2"/>
     <p:sldId id="258" r:id="rId3"/>
+    <p:sldId id="259" r:id="rId4"/>
   </p:sldIdLst>
   <p:sldSz cx="12192000" cy="6858000"/>
   <p:notesSz cx="6858000" cy="9144000"/>
@@ -105,6 +106,11 @@
       </a:defRPr>
     </a:lvl9pPr>
   </p:defaultTextStyle>
+  <p:extLst>
+    <p:ext uri="{EFAFB233-063F-42B5-8137-9DF3F51BA10A}">
+      <p15:sldGuideLst xmlns:p15="http://schemas.microsoft.com/office/powerpoint/2012/main"/>
+    </p:ext>
+  </p:extLst>
 </p:presentation>
 </file>
 
@@ -4219,6 +4225,173 @@
     <p:extLst>
       <p:ext uri="{BB962C8B-B14F-4D97-AF65-F5344CB8AC3E}">
         <p14:creationId xmlns:p14="http://schemas.microsoft.com/office/powerpoint/2010/main" val="3168013530"/>
+      </p:ext>
+    </p:extLst>
+  </p:cSld>
+  <p:clrMapOvr>
+    <a:masterClrMapping/>
+  </p:clrMapOvr>
+</p:sld>
+</file>
+
+<file path=ppt/slides/slide3.xml><?xml version="1.0" encoding="utf-8"?>
+<p:sld xmlns:a="http://schemas.openxmlformats.org/drawingml/2006/main" xmlns:r="http://schemas.openxmlformats.org/officeDocument/2006/relationships" xmlns:p="http://schemas.openxmlformats.org/presentationml/2006/main">
+  <p:cSld>
+    <p:spTree>
+      <p:nvGrpSpPr>
+        <p:cNvPr id="1" name=""/>
+        <p:cNvGrpSpPr/>
+        <p:nvPr/>
+      </p:nvGrpSpPr>
+      <p:grpSpPr>
+        <a:xfrm>
+          <a:off x="0" y="0"/>
+          <a:ext cx="0" cy="0"/>
+          <a:chOff x="0" y="0"/>
+          <a:chExt cx="0" cy="0"/>
+        </a:xfrm>
+      </p:grpSpPr>
+      <p:sp>
+        <p:nvSpPr>
+          <p:cNvPr id="4" name="CasellaDiTesto 3">
+            <a:extLst>
+              <a:ext uri="{FF2B5EF4-FFF2-40B4-BE49-F238E27FC236}">
+                <a16:creationId xmlns:a16="http://schemas.microsoft.com/office/drawing/2014/main" id="{73E6B08E-BF74-552E-8461-B565F3179294}"/>
+              </a:ext>
+            </a:extLst>
+          </p:cNvPr>
+          <p:cNvSpPr txBox="1"/>
+          <p:nvPr/>
+        </p:nvSpPr>
+        <p:spPr>
+          <a:xfrm>
+            <a:off x="1143000" y="538163"/>
+            <a:ext cx="5305425" cy="2862322"/>
+          </a:xfrm>
+          <a:prstGeom prst="rect">
+            <a:avLst/>
+          </a:prstGeom>
+          <a:noFill/>
+        </p:spPr>
+        <p:txBody>
+          <a:bodyPr wrap="square" rtlCol="0">
+            <a:spAutoFit/>
+          </a:bodyPr>
+          <a:lstStyle/>
+          <a:p>
+            <a:r>
+              <a:rPr lang="it-IT" dirty="0"/>
+              <a:t>Public </a:t>
+            </a:r>
+            <a:r>
+              <a:rPr lang="it-IT" dirty="0" err="1"/>
+              <a:t>void</a:t>
+            </a:r>
+            <a:r>
+              <a:rPr lang="it-IT" dirty="0"/>
+              <a:t> </a:t>
+            </a:r>
+            <a:r>
+              <a:rPr lang="it-IT" dirty="0" err="1"/>
+              <a:t>setSaldo</a:t>
+            </a:r>
+            <a:r>
+              <a:rPr lang="it-IT" dirty="0"/>
+              <a:t>( </a:t>
+            </a:r>
+            <a:r>
+              <a:rPr lang="it-IT" dirty="0" err="1"/>
+              <a:t>int</a:t>
+            </a:r>
+            <a:r>
+              <a:rPr lang="it-IT" dirty="0"/>
+              <a:t> importo){</a:t>
+            </a:r>
+          </a:p>
+          <a:p>
+            <a:r>
+              <a:rPr lang="it-IT" dirty="0"/>
+              <a:t> </a:t>
+            </a:r>
+          </a:p>
+          <a:p>
+            <a:r>
+              <a:rPr lang="it-IT" dirty="0"/>
+              <a:t>  	</a:t>
+            </a:r>
+            <a:r>
+              <a:rPr lang="it-IT" dirty="0" err="1"/>
+              <a:t>if</a:t>
+            </a:r>
+            <a:r>
+              <a:rPr lang="it-IT" dirty="0"/>
+              <a:t> ( importo &lt; 100.000){</a:t>
+            </a:r>
+          </a:p>
+          <a:p>
+            <a:r>
+              <a:rPr lang="it-IT" dirty="0"/>
+              <a:t>		</a:t>
+            </a:r>
+            <a:r>
+              <a:rPr lang="it-IT" dirty="0" err="1"/>
+              <a:t>this.saldo</a:t>
+            </a:r>
+            <a:r>
+              <a:rPr lang="it-IT" dirty="0"/>
+              <a:t>=importo;</a:t>
+            </a:r>
+          </a:p>
+          <a:p>
+            <a:r>
+              <a:rPr lang="it-IT" dirty="0"/>
+              <a:t>	}</a:t>
+            </a:r>
+          </a:p>
+          <a:p>
+            <a:r>
+              <a:rPr lang="it-IT" dirty="0"/>
+              <a:t>	else</a:t>
+            </a:r>
+          </a:p>
+          <a:p>
+            <a:r>
+              <a:rPr lang="it-IT" dirty="0"/>
+              <a:t>	{</a:t>
+            </a:r>
+          </a:p>
+          <a:p>
+            <a:r>
+              <a:rPr lang="it-IT" dirty="0"/>
+              <a:t>		</a:t>
+            </a:r>
+            <a:r>
+              <a:rPr lang="it-IT" dirty="0" err="1"/>
+              <a:t>this.saldo</a:t>
+            </a:r>
+            <a:r>
+              <a:rPr lang="it-IT" dirty="0"/>
+              <a:t> =100.000;</a:t>
+            </a:r>
+          </a:p>
+          <a:p>
+            <a:r>
+              <a:rPr lang="it-IT" dirty="0"/>
+              <a:t>	}</a:t>
+            </a:r>
+          </a:p>
+          <a:p>
+            <a:r>
+              <a:rPr lang="it-IT" dirty="0"/>
+              <a:t>}</a:t>
+            </a:r>
+          </a:p>
+        </p:txBody>
+      </p:sp>
+    </p:spTree>
+    <p:extLst>
+      <p:ext uri="{BB962C8B-B14F-4D97-AF65-F5344CB8AC3E}">
+        <p14:creationId xmlns:p14="http://schemas.microsoft.com/office/powerpoint/2010/main" val="3539295554"/>
       </p:ext>
     </p:extLst>
   </p:cSld>
